--- a/openfoam/lipinski/cases/packedBed/充填層二相流_解析報告.pptx
+++ b/openfoam/lipinski/cases/packedBed/充填層二相流_解析報告.pptx
@@ -9290,27 +9290,218 @@
           </a:p>
         </p:txBody>
       </p:sp>
-      <p:sp>
-        <p:nvSpPr>
-          <p:cNvPr id="7" name="Rounded Rectangle 6"/>
+      <p:pic>
+        <p:nvPicPr>
+          <p:cNvPr id="7" name="Picture 6" descr="gauge.png"/>
+          <p:cNvPicPr>
+            <a:picLocks noChangeAspect="1"/>
+          </p:cNvPicPr>
+          <p:nvPr/>
+        </p:nvPicPr>
+        <p:blipFill>
+          <a:blip r:embed="rId2"/>
+          <a:stretch>
+            <a:fillRect/>
+          </a:stretch>
+        </p:blipFill>
+        <p:spPr>
+          <a:xfrm>
+            <a:off x="548640" y="3429000"/>
+            <a:ext cx="566928" cy="566928"/>
+          </a:xfrm>
+          <a:prstGeom prst="rect">
+            <a:avLst/>
+          </a:prstGeom>
+        </p:spPr>
+      </p:pic>
+      <p:sp>
+        <p:nvSpPr>
+          <p:cNvPr id="8" name="TextBox 7"/>
+          <p:cNvSpPr txBox="1"/>
+          <p:nvPr/>
+        </p:nvSpPr>
+        <p:spPr>
+          <a:xfrm>
+            <a:off x="1298448" y="3364992"/>
+            <a:ext cx="2770632" cy="731520"/>
+          </a:xfrm>
+          <a:prstGeom prst="rect">
+            <a:avLst/>
+          </a:prstGeom>
+          <a:noFill/>
+        </p:spPr>
+        <p:txBody>
+          <a:bodyPr wrap="square" anchor="ctr">
+            <a:spAutoFit/>
+          </a:bodyPr>
+          <a:lstStyle/>
+          <a:p>
+            <a:r>
+              <a:rPr sz="1800" b="1">
+                <a:solidFill>
+                  <a:srgbClr val="0B0B0B"/>
+                </a:solidFill>
+              </a:rPr>
+              <a:t>実験</a:t>
+            </a:r>
+          </a:p>
+        </p:txBody>
+      </p:sp>
+      <p:sp>
+        <p:nvSpPr>
+          <p:cNvPr id="9" name="TextBox 8"/>
+          <p:cNvSpPr txBox="1"/>
+          <p:nvPr/>
+        </p:nvSpPr>
+        <p:spPr>
+          <a:xfrm>
+            <a:off x="548640" y="4160520"/>
+            <a:ext cx="3520440" cy="1463040"/>
+          </a:xfrm>
+          <a:prstGeom prst="rect">
+            <a:avLst/>
+          </a:prstGeom>
+          <a:noFill/>
+        </p:spPr>
+        <p:txBody>
+          <a:bodyPr wrap="square">
+            <a:spAutoFit/>
+          </a:bodyPr>
+          <a:lstStyle/>
+          <a:p>
+            <a:pPr>
+              <a:lnSpc>
+                <a:spcPct val="130000"/>
+              </a:lnSpc>
+            </a:pPr>
+            <a:r>
+              <a:rPr sz="1300">
+                <a:solidFill>
+                  <a:srgbClr val="52514E"/>
+                </a:solidFill>
+              </a:rPr>
+              <a:t>圧力タップ間隔 0.1 m の差圧計測
+（8 条件すべて取得済み）</a:t>
+            </a:r>
+          </a:p>
+        </p:txBody>
+      </p:sp>
+      <p:pic>
+        <p:nvPicPr>
+          <p:cNvPr id="10" name="Picture 9" descr="sigma.png"/>
+          <p:cNvPicPr>
+            <a:picLocks noChangeAspect="1"/>
+          </p:cNvPicPr>
+          <p:nvPr/>
+        </p:nvPicPr>
+        <p:blipFill>
+          <a:blip r:embed="rId3"/>
+          <a:stretch>
+            <a:fillRect/>
+          </a:stretch>
+        </p:blipFill>
+        <p:spPr>
+          <a:xfrm>
+            <a:off x="4343400" y="3429000"/>
+            <a:ext cx="566928" cy="566928"/>
+          </a:xfrm>
+          <a:prstGeom prst="rect">
+            <a:avLst/>
+          </a:prstGeom>
+        </p:spPr>
+      </p:pic>
+      <p:sp>
+        <p:nvSpPr>
+          <p:cNvPr id="11" name="TextBox 10"/>
+          <p:cNvSpPr txBox="1"/>
+          <p:nvPr/>
+        </p:nvSpPr>
+        <p:spPr>
+          <a:xfrm>
+            <a:off x="5093208" y="3364992"/>
+            <a:ext cx="2770632" cy="731520"/>
+          </a:xfrm>
+          <a:prstGeom prst="rect">
+            <a:avLst/>
+          </a:prstGeom>
+          <a:noFill/>
+        </p:spPr>
+        <p:txBody>
+          <a:bodyPr wrap="square" anchor="ctr">
+            <a:spAutoFit/>
+          </a:bodyPr>
+          <a:lstStyle/>
+          <a:p>
+            <a:r>
+              <a:rPr sz="1800" b="1">
+                <a:solidFill>
+                  <a:srgbClr val="2A78D6"/>
+                </a:solidFill>
+              </a:rPr>
+              <a:t>Lipinski モデル</a:t>
+            </a:r>
+          </a:p>
+        </p:txBody>
+      </p:sp>
+      <p:sp>
+        <p:nvSpPr>
+          <p:cNvPr id="12" name="TextBox 11"/>
+          <p:cNvSpPr txBox="1"/>
+          <p:nvPr/>
+        </p:nvSpPr>
+        <p:spPr>
+          <a:xfrm>
+            <a:off x="4343400" y="4160520"/>
+            <a:ext cx="3520440" cy="1463040"/>
+          </a:xfrm>
+          <a:prstGeom prst="rect">
+            <a:avLst/>
+          </a:prstGeom>
+          <a:noFill/>
+        </p:spPr>
+        <p:txBody>
+          <a:bodyPr wrap="square">
+            <a:spAutoFit/>
+          </a:bodyPr>
+          <a:lstStyle/>
+          <a:p>
+            <a:pPr>
+              <a:lnSpc>
+                <a:spcPct val="130000"/>
+              </a:lnSpc>
+            </a:pPr>
+            <a:r>
+              <a:rPr sz="1300">
+                <a:solidFill>
+                  <a:srgbClr val="52514E"/>
+                </a:solidFill>
+              </a:rPr>
+              <a:t>1 次元の相間釣り合いから
+ボイド率と圧力勾配を解く
+(calculation/lipinski.cpp)</a:t>
+            </a:r>
+          </a:p>
+        </p:txBody>
+      </p:sp>
+      <p:sp>
+        <p:nvSpPr>
+          <p:cNvPr id="13" name="Rectangle 12"/>
           <p:cNvSpPr/>
           <p:nvPr/>
         </p:nvSpPr>
         <p:spPr>
           <a:xfrm>
-            <a:off x="548640" y="3383280"/>
-            <a:ext cx="3520440" cy="2377440"/>
+            <a:off x="4206240" y="3429000"/>
+            <a:ext cx="12700" cy="2103120"/>
           </a:xfrm>
-          <a:prstGeom prst="roundRect">
+          <a:prstGeom prst="rect">
             <a:avLst/>
           </a:prstGeom>
           <a:solidFill>
-            <a:srgbClr val="F2F1EC"/>
+            <a:srgbClr val="DDDCD6"/>
           </a:solidFill>
-          <a:ln w="19050">
-            <a:solidFill>
-              <a:srgbClr val="0B0B0B"/>
-            </a:solidFill>
+          <a:ln>
+            <a:noFill/>
           </a:ln>
           <a:effectLst/>
         </p:spPr>
@@ -9336,59 +9527,40 @@
           </a:p>
         </p:txBody>
       </p:sp>
-      <p:sp>
-        <p:nvSpPr>
-          <p:cNvPr id="8" name="Rectangle 7"/>
-          <p:cNvSpPr/>
+      <p:pic>
+        <p:nvPicPr>
+          <p:cNvPr id="14" name="Picture 13" descr="cpu.png"/>
+          <p:cNvPicPr>
+            <a:picLocks noChangeAspect="1"/>
+          </p:cNvPicPr>
           <p:nvPr/>
-        </p:nvSpPr>
+        </p:nvPicPr>
+        <p:blipFill>
+          <a:blip r:embed="rId4"/>
+          <a:stretch>
+            <a:fillRect/>
+          </a:stretch>
+        </p:blipFill>
         <p:spPr>
           <a:xfrm>
-            <a:off x="548640" y="3383280"/>
-            <a:ext cx="3520440" cy="109728"/>
+            <a:off x="8138160" y="3429000"/>
+            <a:ext cx="566928" cy="566928"/>
           </a:xfrm>
           <a:prstGeom prst="rect">
             <a:avLst/>
           </a:prstGeom>
-          <a:solidFill>
-            <a:srgbClr val="0B0B0B"/>
-          </a:solidFill>
-          <a:ln>
-            <a:noFill/>
-          </a:ln>
         </p:spPr>
-        <p:style>
-          <a:lnRef idx="1">
-            <a:schemeClr val="accent1"/>
-          </a:lnRef>
-          <a:fillRef idx="3">
-            <a:schemeClr val="accent1"/>
-          </a:fillRef>
-          <a:effectRef idx="2">
-            <a:schemeClr val="accent1"/>
-          </a:effectRef>
-          <a:fontRef idx="minor">
-            <a:schemeClr val="lt1"/>
-          </a:fontRef>
-        </p:style>
-        <p:txBody>
-          <a:bodyPr rtlCol="0" anchor="ctr"/>
-          <a:lstStyle/>
-          <a:p>
-            <a:pPr algn="ctr"/>
-          </a:p>
-        </p:txBody>
-      </p:sp>
-      <p:sp>
-        <p:nvSpPr>
-          <p:cNvPr id="9" name="TextBox 8"/>
+      </p:pic>
+      <p:sp>
+        <p:nvSpPr>
+          <p:cNvPr id="15" name="TextBox 14"/>
           <p:cNvSpPr txBox="1"/>
           <p:nvPr/>
         </p:nvSpPr>
         <p:spPr>
           <a:xfrm>
-            <a:off x="731520" y="3611880"/>
-            <a:ext cx="3154680" cy="2103120"/>
+            <a:off x="8887967" y="3364992"/>
+            <a:ext cx="2770632" cy="731520"/>
           </a:xfrm>
           <a:prstGeom prst="rect">
             <a:avLst/>
@@ -9396,28 +9568,48 @@
           <a:noFill/>
         </p:spPr>
         <p:txBody>
+          <a:bodyPr wrap="square" anchor="ctr">
+            <a:spAutoFit/>
+          </a:bodyPr>
+          <a:lstStyle/>
+          <a:p>
+            <a:r>
+              <a:rPr sz="1800" b="1">
+                <a:solidFill>
+                  <a:srgbClr val="EB6834"/>
+                </a:solidFill>
+              </a:rPr>
+              <a:t>OpenFOAM</a:t>
+            </a:r>
+          </a:p>
+        </p:txBody>
+      </p:sp>
+      <p:sp>
+        <p:nvSpPr>
+          <p:cNvPr id="16" name="TextBox 15"/>
+          <p:cNvSpPr txBox="1"/>
+          <p:nvPr/>
+        </p:nvSpPr>
+        <p:spPr>
+          <a:xfrm>
+            <a:off x="8138160" y="4160520"/>
+            <a:ext cx="3520440" cy="1463040"/>
+          </a:xfrm>
+          <a:prstGeom prst="rect">
+            <a:avLst/>
+          </a:prstGeom>
+          <a:noFill/>
+        </p:spPr>
+        <p:txBody>
           <a:bodyPr wrap="square">
             <a:spAutoFit/>
           </a:bodyPr>
           <a:lstStyle/>
           <a:p>
-            <a:r>
-              <a:rPr sz="1800" b="1">
-                <a:solidFill>
-                  <a:srgbClr val="0B0B0B"/>
-                </a:solidFill>
-              </a:rPr>
-              <a:t>実験</a:t>
-            </a:r>
-          </a:p>
-          <a:p>
             <a:pPr>
               <a:lnSpc>
                 <a:spcPct val="130000"/>
               </a:lnSpc>
-              <a:spcBef>
-                <a:spcPts val="1000"/>
-              </a:spcBef>
             </a:pPr>
             <a:r>
               <a:rPr sz="1300">
@@ -9425,33 +9617,32 @@
                   <a:srgbClr val="52514E"/>
                 </a:solidFill>
               </a:rPr>
-              <a:t>圧力タップ間隔 0.1 m の差圧計測
-（8 条件すべて取得済み）</a:t>
-            </a:r>
-          </a:p>
-        </p:txBody>
-      </p:sp>
-      <p:sp>
-        <p:nvSpPr>
-          <p:cNvPr id="10" name="Rounded Rectangle 9"/>
+              <a:t>Euler-Euler 二流体モデル
+＋ Darcy-Forchheimer 多孔質抵抗
+（自作ソルバ myTwoPhaseEulerFoam）</a:t>
+            </a:r>
+          </a:p>
+        </p:txBody>
+      </p:sp>
+      <p:sp>
+        <p:nvSpPr>
+          <p:cNvPr id="17" name="Rectangle 16"/>
           <p:cNvSpPr/>
           <p:nvPr/>
         </p:nvSpPr>
         <p:spPr>
           <a:xfrm>
-            <a:off x="4343400" y="3383280"/>
-            <a:ext cx="3520440" cy="2377440"/>
+            <a:off x="8001000" y="3429000"/>
+            <a:ext cx="12700" cy="2103120"/>
           </a:xfrm>
-          <a:prstGeom prst="roundRect">
+          <a:prstGeom prst="rect">
             <a:avLst/>
           </a:prstGeom>
           <a:solidFill>
-            <a:srgbClr val="F2F1EC"/>
+            <a:srgbClr val="DDDCD6"/>
           </a:solidFill>
-          <a:ln w="19050">
-            <a:solidFill>
-              <a:srgbClr val="2A78D6"/>
-            </a:solidFill>
+          <a:ln>
+            <a:noFill/>
           </a:ln>
           <a:effectLst/>
         </p:spPr>
@@ -9479,245 +9670,7 @@
       </p:sp>
       <p:sp>
         <p:nvSpPr>
-          <p:cNvPr id="11" name="Rectangle 10"/>
-          <p:cNvSpPr/>
-          <p:nvPr/>
-        </p:nvSpPr>
-        <p:spPr>
-          <a:xfrm>
-            <a:off x="4343400" y="3383280"/>
-            <a:ext cx="3520440" cy="109728"/>
-          </a:xfrm>
-          <a:prstGeom prst="rect">
-            <a:avLst/>
-          </a:prstGeom>
-          <a:solidFill>
-            <a:srgbClr val="2A78D6"/>
-          </a:solidFill>
-          <a:ln>
-            <a:noFill/>
-          </a:ln>
-        </p:spPr>
-        <p:style>
-          <a:lnRef idx="1">
-            <a:schemeClr val="accent1"/>
-          </a:lnRef>
-          <a:fillRef idx="3">
-            <a:schemeClr val="accent1"/>
-          </a:fillRef>
-          <a:effectRef idx="2">
-            <a:schemeClr val="accent1"/>
-          </a:effectRef>
-          <a:fontRef idx="minor">
-            <a:schemeClr val="lt1"/>
-          </a:fontRef>
-        </p:style>
-        <p:txBody>
-          <a:bodyPr rtlCol="0" anchor="ctr"/>
-          <a:lstStyle/>
-          <a:p>
-            <a:pPr algn="ctr"/>
-          </a:p>
-        </p:txBody>
-      </p:sp>
-      <p:sp>
-        <p:nvSpPr>
-          <p:cNvPr id="12" name="TextBox 11"/>
-          <p:cNvSpPr txBox="1"/>
-          <p:nvPr/>
-        </p:nvSpPr>
-        <p:spPr>
-          <a:xfrm>
-            <a:off x="4526280" y="3611880"/>
-            <a:ext cx="3154680" cy="2103120"/>
-          </a:xfrm>
-          <a:prstGeom prst="rect">
-            <a:avLst/>
-          </a:prstGeom>
-          <a:noFill/>
-        </p:spPr>
-        <p:txBody>
-          <a:bodyPr wrap="square">
-            <a:spAutoFit/>
-          </a:bodyPr>
-          <a:lstStyle/>
-          <a:p>
-            <a:r>
-              <a:rPr sz="1800" b="1">
-                <a:solidFill>
-                  <a:srgbClr val="2A78D6"/>
-                </a:solidFill>
-              </a:rPr>
-              <a:t>Lipinski モデル</a:t>
-            </a:r>
-          </a:p>
-          <a:p>
-            <a:pPr>
-              <a:lnSpc>
-                <a:spcPct val="130000"/>
-              </a:lnSpc>
-              <a:spcBef>
-                <a:spcPts val="1000"/>
-              </a:spcBef>
-            </a:pPr>
-            <a:r>
-              <a:rPr sz="1300">
-                <a:solidFill>
-                  <a:srgbClr val="52514E"/>
-                </a:solidFill>
-              </a:rPr>
-              <a:t>1 次元の相間釣り合いから
-ボイド率と圧力勾配を解く
-(calculation/lipinski.cpp)</a:t>
-            </a:r>
-          </a:p>
-        </p:txBody>
-      </p:sp>
-      <p:sp>
-        <p:nvSpPr>
-          <p:cNvPr id="13" name="Rounded Rectangle 12"/>
-          <p:cNvSpPr/>
-          <p:nvPr/>
-        </p:nvSpPr>
-        <p:spPr>
-          <a:xfrm>
-            <a:off x="8138160" y="3383280"/>
-            <a:ext cx="3520440" cy="2377440"/>
-          </a:xfrm>
-          <a:prstGeom prst="roundRect">
-            <a:avLst/>
-          </a:prstGeom>
-          <a:solidFill>
-            <a:srgbClr val="F2F1EC"/>
-          </a:solidFill>
-          <a:ln w="19050">
-            <a:solidFill>
-              <a:srgbClr val="EB6834"/>
-            </a:solidFill>
-          </a:ln>
-          <a:effectLst/>
-        </p:spPr>
-        <p:style>
-          <a:lnRef idx="1">
-            <a:schemeClr val="accent1"/>
-          </a:lnRef>
-          <a:fillRef idx="3">
-            <a:schemeClr val="accent1"/>
-          </a:fillRef>
-          <a:effectRef idx="2">
-            <a:schemeClr val="accent1"/>
-          </a:effectRef>
-          <a:fontRef idx="minor">
-            <a:schemeClr val="lt1"/>
-          </a:fontRef>
-        </p:style>
-        <p:txBody>
-          <a:bodyPr rtlCol="0" anchor="ctr"/>
-          <a:lstStyle/>
-          <a:p>
-            <a:pPr algn="ctr"/>
-          </a:p>
-        </p:txBody>
-      </p:sp>
-      <p:sp>
-        <p:nvSpPr>
-          <p:cNvPr id="14" name="Rectangle 13"/>
-          <p:cNvSpPr/>
-          <p:nvPr/>
-        </p:nvSpPr>
-        <p:spPr>
-          <a:xfrm>
-            <a:off x="8138160" y="3383280"/>
-            <a:ext cx="3520440" cy="109728"/>
-          </a:xfrm>
-          <a:prstGeom prst="rect">
-            <a:avLst/>
-          </a:prstGeom>
-          <a:solidFill>
-            <a:srgbClr val="EB6834"/>
-          </a:solidFill>
-          <a:ln>
-            <a:noFill/>
-          </a:ln>
-        </p:spPr>
-        <p:style>
-          <a:lnRef idx="1">
-            <a:schemeClr val="accent1"/>
-          </a:lnRef>
-          <a:fillRef idx="3">
-            <a:schemeClr val="accent1"/>
-          </a:fillRef>
-          <a:effectRef idx="2">
-            <a:schemeClr val="accent1"/>
-          </a:effectRef>
-          <a:fontRef idx="minor">
-            <a:schemeClr val="lt1"/>
-          </a:fontRef>
-        </p:style>
-        <p:txBody>
-          <a:bodyPr rtlCol="0" anchor="ctr"/>
-          <a:lstStyle/>
-          <a:p>
-            <a:pPr algn="ctr"/>
-          </a:p>
-        </p:txBody>
-      </p:sp>
-      <p:sp>
-        <p:nvSpPr>
-          <p:cNvPr id="15" name="TextBox 14"/>
-          <p:cNvSpPr txBox="1"/>
-          <p:nvPr/>
-        </p:nvSpPr>
-        <p:spPr>
-          <a:xfrm>
-            <a:off x="8321040" y="3611880"/>
-            <a:ext cx="3154680" cy="2103120"/>
-          </a:xfrm>
-          <a:prstGeom prst="rect">
-            <a:avLst/>
-          </a:prstGeom>
-          <a:noFill/>
-        </p:spPr>
-        <p:txBody>
-          <a:bodyPr wrap="square">
-            <a:spAutoFit/>
-          </a:bodyPr>
-          <a:lstStyle/>
-          <a:p>
-            <a:r>
-              <a:rPr sz="1800" b="1">
-                <a:solidFill>
-                  <a:srgbClr val="EB6834"/>
-                </a:solidFill>
-              </a:rPr>
-              <a:t>OpenFOAM</a:t>
-            </a:r>
-          </a:p>
-          <a:p>
-            <a:pPr>
-              <a:lnSpc>
-                <a:spcPct val="130000"/>
-              </a:lnSpc>
-              <a:spcBef>
-                <a:spcPts val="1000"/>
-              </a:spcBef>
-            </a:pPr>
-            <a:r>
-              <a:rPr sz="1300">
-                <a:solidFill>
-                  <a:srgbClr val="52514E"/>
-                </a:solidFill>
-              </a:rPr>
-              <a:t>Euler-Euler 二流体モデル
-＋ Darcy-Forchheimer 多孔質抵抗
-（自作ソルバ myTwoPhaseEulerFoam）</a:t>
-            </a:r>
-          </a:p>
-        </p:txBody>
-      </p:sp>
-      <p:sp>
-        <p:nvSpPr>
-          <p:cNvPr id="16" name="TextBox 15"/>
+          <p:cNvPr id="18" name="TextBox 17"/>
           <p:cNvSpPr txBox="1"/>
           <p:nvPr/>
         </p:nvSpPr>
